--- a/reports/phase1_presentation.pptx
+++ b/reports/phase1_presentation.pptx
@@ -312,7 +312,7 @@
           <a:p>
             <a:fld id="{5BCAD085-E8A6-8845-BD4E-CB4CCA059FC4}" type="datetimeFigureOut">
               <a:rPr lang="en-US" smtClean="0"/>
-              <a:t>10/28/26</a:t>
+              <a:t>10/29/26</a:t>
             </a:fld>
             <a:endParaRPr lang="en-US"/>
           </a:p>
@@ -480,7 +480,7 @@
           <a:p>
             <a:fld id="{5BCAD085-E8A6-8845-BD4E-CB4CCA059FC4}" type="datetimeFigureOut">
               <a:rPr lang="en-US" smtClean="0"/>
-              <a:t>10/28/26</a:t>
+              <a:t>10/29/26</a:t>
             </a:fld>
             <a:endParaRPr lang="en-US"/>
           </a:p>
@@ -658,7 +658,7 @@
           <a:p>
             <a:fld id="{5BCAD085-E8A6-8845-BD4E-CB4CCA059FC4}" type="datetimeFigureOut">
               <a:rPr lang="en-US" smtClean="0"/>
-              <a:t>10/28/26</a:t>
+              <a:t>10/29/26</a:t>
             </a:fld>
             <a:endParaRPr lang="en-US"/>
           </a:p>
@@ -826,7 +826,7 @@
           <a:p>
             <a:fld id="{5BCAD085-E8A6-8845-BD4E-CB4CCA059FC4}" type="datetimeFigureOut">
               <a:rPr lang="en-US" smtClean="0"/>
-              <a:t>10/28/26</a:t>
+              <a:t>10/29/26</a:t>
             </a:fld>
             <a:endParaRPr lang="en-US"/>
           </a:p>
@@ -1071,7 +1071,7 @@
           <a:p>
             <a:fld id="{5BCAD085-E8A6-8845-BD4E-CB4CCA059FC4}" type="datetimeFigureOut">
               <a:rPr lang="en-US" smtClean="0"/>
-              <a:t>10/28/26</a:t>
+              <a:t>10/29/26</a:t>
             </a:fld>
             <a:endParaRPr lang="en-US"/>
           </a:p>
@@ -1356,7 +1356,7 @@
           <a:p>
             <a:fld id="{5BCAD085-E8A6-8845-BD4E-CB4CCA059FC4}" type="datetimeFigureOut">
               <a:rPr lang="en-US" smtClean="0"/>
-              <a:t>10/28/26</a:t>
+              <a:t>10/29/26</a:t>
             </a:fld>
             <a:endParaRPr lang="en-US"/>
           </a:p>
@@ -1775,7 +1775,7 @@
           <a:p>
             <a:fld id="{5BCAD085-E8A6-8845-BD4E-CB4CCA059FC4}" type="datetimeFigureOut">
               <a:rPr lang="en-US" smtClean="0"/>
-              <a:t>10/28/26</a:t>
+              <a:t>10/29/26</a:t>
             </a:fld>
             <a:endParaRPr lang="en-US"/>
           </a:p>
@@ -1892,7 +1892,7 @@
           <a:p>
             <a:fld id="{5BCAD085-E8A6-8845-BD4E-CB4CCA059FC4}" type="datetimeFigureOut">
               <a:rPr lang="en-US" smtClean="0"/>
-              <a:t>10/28/26</a:t>
+              <a:t>10/29/26</a:t>
             </a:fld>
             <a:endParaRPr lang="en-US"/>
           </a:p>
@@ -1987,7 +1987,7 @@
           <a:p>
             <a:fld id="{5BCAD085-E8A6-8845-BD4E-CB4CCA059FC4}" type="datetimeFigureOut">
               <a:rPr lang="en-US" smtClean="0"/>
-              <a:t>10/28/26</a:t>
+              <a:t>10/29/26</a:t>
             </a:fld>
             <a:endParaRPr lang="en-US"/>
           </a:p>
@@ -2262,7 +2262,7 @@
           <a:p>
             <a:fld id="{5BCAD085-E8A6-8845-BD4E-CB4CCA059FC4}" type="datetimeFigureOut">
               <a:rPr lang="en-US" smtClean="0"/>
-              <a:t>10/28/26</a:t>
+              <a:t>10/29/26</a:t>
             </a:fld>
             <a:endParaRPr lang="en-US"/>
           </a:p>
@@ -2514,7 +2514,7 @@
           <a:p>
             <a:fld id="{5BCAD085-E8A6-8845-BD4E-CB4CCA059FC4}" type="datetimeFigureOut">
               <a:rPr lang="en-US" smtClean="0"/>
-              <a:t>10/28/26</a:t>
+              <a:t>10/29/26</a:t>
             </a:fld>
             <a:endParaRPr lang="en-US"/>
           </a:p>
@@ -2725,7 +2725,7 @@
           <a:p>
             <a:fld id="{5BCAD085-E8A6-8845-BD4E-CB4CCA059FC4}" type="datetimeFigureOut">
               <a:rPr lang="en-US" smtClean="0"/>
-              <a:t>10/28/26</a:t>
+              <a:t>10/29/26</a:t>
             </a:fld>
             <a:endParaRPr lang="en-US"/>
           </a:p>
@@ -14397,7 +14397,7 @@
         <p:spPr>
           <a:xfrm>
             <a:off x="868680" y="4846320"/>
-            <a:ext cx="4617720" cy="1005840"/>
+            <a:ext cx="4617720" cy="584775"/>
           </a:xfrm>
           <a:prstGeom prst="rect">
             <a:avLst/>
@@ -14416,13 +14416,49 @@
               </a:spcAft>
             </a:pPr>
             <a:r>
-              <a:rPr sz="1100">
+              <a:rPr sz="1100" dirty="0">
                 <a:solidFill>
                   <a:srgbClr val="0F172A"/>
                 </a:solidFill>
                 <a:latin typeface="Calibri"/>
               </a:rPr>
-              <a:t>•  Fastest Model: 0.0006 ms/image (450× faster than k-NN, 43× faster than RF).</a:t>
+              <a:t>•  Fast Model: 0.000</a:t>
+            </a:r>
+            <a:r>
+              <a:rPr lang="en-US" sz="1100" dirty="0">
+                <a:solidFill>
+                  <a:srgbClr val="0F172A"/>
+                </a:solidFill>
+                <a:latin typeface="Calibri"/>
+              </a:rPr>
+              <a:t>6</a:t>
+            </a:r>
+            <a:r>
+              <a:rPr sz="1100" dirty="0">
+                <a:solidFill>
+                  <a:srgbClr val="0F172A"/>
+                </a:solidFill>
+                <a:latin typeface="Calibri"/>
+              </a:rPr>
+              <a:t> </a:t>
+            </a:r>
+            <a:r>
+              <a:rPr sz="1100" dirty="0" err="1">
+                <a:solidFill>
+                  <a:srgbClr val="0F172A"/>
+                </a:solidFill>
+                <a:latin typeface="Calibri"/>
+              </a:rPr>
+              <a:t>ms</a:t>
+            </a:r>
+            <a:r>
+              <a:rPr sz="1100" dirty="0">
+                <a:solidFill>
+                  <a:srgbClr val="0F172A"/>
+                </a:solidFill>
+                <a:latin typeface="Calibri"/>
+              </a:rPr>
+              <a:t>/image (450× faster than k-NN, 43× faster than RF).</a:t>
             </a:r>
           </a:p>
           <a:p>
@@ -14432,7 +14468,7 @@
               </a:spcAft>
             </a:pPr>
             <a:r>
-              <a:rPr sz="1100">
+              <a:rPr sz="1100" dirty="0">
                 <a:solidFill>
                   <a:srgbClr val="0F172A"/>
                 </a:solidFill>
@@ -14448,7 +14484,7 @@
               </a:spcAft>
             </a:pPr>
             <a:r>
-              <a:rPr sz="1100">
+              <a:rPr sz="1100" dirty="0">
                 <a:solidFill>
                   <a:srgbClr val="0F172A"/>
                 </a:solidFill>
